--- a/Documentation/Luxelle PPT.pptx
+++ b/Documentation/Luxelle PPT.pptx
@@ -22716,34 +22716,6 @@
           </a:graphicData>
         </a:graphic>
       </p:graphicFrame>
-      <p:pic>
-        <p:nvPicPr>
-          <p:cNvPr id="4" name="Picture 3">
-            <a:extLst>
-              <a:ext uri="{FF2B5EF4-FFF2-40B4-BE49-F238E27FC236}">
-                <a16:creationId xmlns:a16="http://schemas.microsoft.com/office/drawing/2014/main" id="{EE16631C-443C-8279-C458-10F8DEF178BF}"/>
-              </a:ext>
-            </a:extLst>
-          </p:cNvPr>
-          <p:cNvPicPr/>
-          <p:nvPr/>
-        </p:nvPicPr>
-        <p:blipFill>
-          <a:blip r:embed="rId3"/>
-          <a:stretch>
-            <a:fillRect/>
-          </a:stretch>
-        </p:blipFill>
-        <p:spPr>
-          <a:xfrm>
-            <a:off x="138355" y="53340"/>
-            <a:ext cx="1379727" cy="1379727"/>
-          </a:xfrm>
-          <a:prstGeom prst="rect">
-            <a:avLst/>
-          </a:prstGeom>
-        </p:spPr>
-      </p:pic>
       <p:sp>
         <p:nvSpPr>
           <p:cNvPr id="7" name="TextBox 6">
@@ -22926,6 +22898,50 @@
           </a:fontRef>
         </p:style>
       </p:cxnSp>
+      <p:pic>
+        <p:nvPicPr>
+          <p:cNvPr id="4" name="Picture 3">
+            <a:extLst>
+              <a:ext uri="{FF2B5EF4-FFF2-40B4-BE49-F238E27FC236}">
+                <a16:creationId xmlns:a16="http://schemas.microsoft.com/office/drawing/2014/main" id="{0EA37732-96DC-5CF0-7387-232195824901}"/>
+              </a:ext>
+            </a:extLst>
+          </p:cNvPr>
+          <p:cNvPicPr>
+            <a:picLocks noChangeAspect="1"/>
+          </p:cNvPicPr>
+          <p:nvPr/>
+        </p:nvPicPr>
+        <p:blipFill>
+          <a:blip r:embed="rId3" cstate="print">
+            <a:extLst>
+              <a:ext uri="{28A0092B-C50C-407E-A947-70E740481C1C}">
+                <a14:useLocalDpi xmlns:a14="http://schemas.microsoft.com/office/drawing/2010/main" val="0"/>
+              </a:ext>
+            </a:extLst>
+          </a:blip>
+          <a:srcRect/>
+          <a:stretch>
+            <a:fillRect/>
+          </a:stretch>
+        </p:blipFill>
+        <p:spPr bwMode="auto">
+          <a:xfrm>
+            <a:off x="177178" y="181567"/>
+            <a:ext cx="1378800" cy="1378800"/>
+          </a:xfrm>
+          <a:prstGeom prst="rect">
+            <a:avLst/>
+          </a:prstGeom>
+          <a:noFill/>
+          <a:ln w="9525">
+            <a:noFill/>
+            <a:miter lim="800000"/>
+            <a:headEnd/>
+            <a:tailEnd/>
+          </a:ln>
+        </p:spPr>
+      </p:pic>
     </p:spTree>
   </p:cSld>
   <p:clrMapOvr>
